--- a/쉼표정류장_발표자료_팀오댕국_v2.pptx
+++ b/쉼표정류장_발표자료_팀오댕국_v2.pptx
@@ -611,7 +611,7 @@
           <a:p>
             <a:r>
               <a:rPr lang="en-US" dirty="0"/>
-              <a:t>[시연] 홈 화면입니다. 출발은 GPS 주소가 자동으로 들어가고, 도착만 고르면 됩니다. 음성 버튼을 눌러 '춘천중앙시장'이라고 말하면 바로 검색됩니다. 고른 위치를 지도로 한 번 되보여주는 것은, 글자만 보고 잘못 고르는 일을 막기 위해서입니다. 확인을 누르면 탈 버스와 실시간 도착 시간이 카드로 나옵니다.</a:t>
+              <a:t>[시연] 홈 화면입니다. 출발지는 이미 채워져 있습니다 — GPS 좌표를 주소로 바꿔 넣은 것이라 어르신이 자기 집 주소를 입력할 필요가 없습니다. 도착만 고르면 됩니다. 오른쪽처럼 마이크 버튼을 눌러 말해도 되고, 고른 위치가 맞는지 지도로 한 번 되보여 줍니다. '한림대학교'처럼 비슷한 이름이 여럿일 때 글자만 보고 잘못 고르는 일을 막기 위해서입니다.</a:t>
             </a:r>
             <a:endParaRPr lang="en-US" dirty="0"/>
           </a:p>
@@ -699,7 +699,7 @@
           <a:p>
             <a:r>
               <a:rPr lang="en-US" dirty="0"/>
-              <a:t>[시연] 실제로 타고 가는 동안 보는 화면입니다. 위에 지도, 아래에 타임라인이 있습니다. 지금 화면에는 '15번 1분 후 도착'이 떠 있는데 이건 국토부 TAGO 실시간 데이터입니다. 버스 안에 있으면 '명동입구 하차까지 1개 정류장'처럼 지금 위치가 카드로 끼어듭니다. 도착 정보를 못 받아오면 '도착 정보 없음'이라고 그대로 씁니다. 가짜 숫자를 보여주지 않습니다.</a:t>
+              <a:t>[시연] 확인을 누르면 왼쪽처럼 추천 경로가 하나 나옵니다. 여러 개를 보여주면 고르는 것 자체가 일이 되기 때문입니다. 카드를 누르면 오른쪽 타임라인으로 들어갑니다. 타는 곳 동산A, 한 정류장 뒤 하차, 걸어서 도착 — 이게 전부입니다. 각 지점마다 시설 칩이 붙는데, 점선으로 흐린 '지붕'과 '쉘터'가 없다는 뜻입니다. 그리고 지금 화면에 '지금 오는 버스 없음'이라고 떠 있습니다. 실시간 정보를 못 받으면 못 받았다고 그대로 씁니다. 가짜 숫자를 채워 넣지 않는 것이 저희 원칙입니다.</a:t>
             </a:r>
             <a:endParaRPr lang="en-US" dirty="0"/>
           </a:p>
@@ -787,7 +787,7 @@
           <a:p>
             <a:r>
               <a:rPr lang="en-US" dirty="0"/>
-              <a:t>[시연] 정류장 상세와 쉼터 지도입니다. 왼쪽 화면에서 '지붕 없음'을 보고, 아래 근처 무더위쉼터로 넘어갑니다. 오른쪽 지도는 쉼터만 표시합니다. 정류장 핀까지 겹치면 어르신에게는 그냥 복잡한 지도가 되기 때문입니다. '운영 종료'처럼 지금 문을 닫았으면 닫았다고 씁니다.</a:t>
+              <a:t>[시연] 왼쪽은 시연 모드입니다. 발표장에서 실제로 버스를 탈 수는 없으니, [다음] 버튼으로 위치를 한 칸씩 옮겨가며 승차·하차·도착 화면을 보여드릴 수 있게 만들었습니다. 화면에 뜨는 정류장·시설·거리는 전부 실제 데이터입니다. 오른쪽은 쉼터 탭입니다. 정류장 핀까지 겹치면 어르신에게는 그냥 복잡한 지도가 되기 때문에 쉼터만 초록 핀으로 띄웠습니다. 56m 떨어진 GS25가 지금 '운영 중'이라고 나옵니다. 문을 닫았으면 닫았다고 씁니다.</a:t>
             </a:r>
             <a:endParaRPr lang="en-US" dirty="0"/>
           </a:p>
@@ -875,7 +875,7 @@
           <a:p>
             <a:r>
               <a:rPr lang="en-US" dirty="0"/>
-              <a:t>[시연] 민원 탭입니다. 화면에 '사진 찍기' 버튼 하나뿐입니다. 정류장이 어디인지, 언제 찍었는지 묻지 않습니다. 위치와 시각은 시스템이 압니다. 사진이 올라가면 서버에서 VLM이 시설 유무와 민원 종류를 읽고, 그 결과가 다음 사람이 보는 안내 정보가 됩니다. 지금 그늘 정보가 없는 정류장이 1,729곳인데, 이 기능이 그 숫자를 줄여 갑니다.</a:t>
+              <a:t>[시연] 민원 탭입니다. 화면에 '사진 찍기' 버튼 하나뿐입니다. 정류장이 어디인지, 언제 찍었는지 묻지 않습니다. 위치와 시각은 시스템이 압니다. 찍기 전에 '얼굴과 차량번호는 피해서 찍어 주세요'라고 한 줄 안내합니다. 보내는 사람의 개인정보를 안 받는 것에 더해, 사진에 찍힐 수 있는 남의 정보까지 생각한 문구입니다. 사진이 올라가면 서버에서 AI가 시설 유무와 민원 종류를 읽고, 그 결과가 다음 사람이 보는 안내 정보가 됩니다. 지금 그늘 정보가 없는 정류장이 1,729곳인데, 이 기능이 그 숫자를 줄여 갑니다.</a:t>
             </a:r>
             <a:endParaRPr lang="en-US" dirty="0"/>
           </a:p>
@@ -3480,7 +3480,7 @@
                 <a:ea typeface="맑은 고딕" pitchFamily="34" charset="-122"/>
                 <a:cs typeface="맑은 고딕" pitchFamily="34" charset="-120"/>
               </a:rPr>
-              <a:t>가는 길 찾기 — 말로 목적지를 찾고, 탈 버스를 받습니다</a:t>
+              <a:t>가는 길 찾기 — 어르신이 채울 칸은 '도착' 하나뿐</a:t>
             </a:r>
             <a:endParaRPr lang="en-US" sz="2700" dirty="0"/>
           </a:p>
@@ -3519,7 +3519,7 @@
                 <a:ea typeface="맑은 고딕" pitchFamily="34" charset="-122"/>
                 <a:cs typeface="맑은 고딕" pitchFamily="34" charset="-120"/>
               </a:rPr>
-              <a:t>홈 화면이 곧 길찾기입니다. 어르신이 처음 보는 문장은 '어디로 가시나요?' 하나뿐</a:t>
+              <a:t>홈 화면이 곧 길찾기입니다. 처음 보는 문장은 '어디로 가시나요?' 하나</a:t>
             </a:r>
             <a:endParaRPr lang="en-US" sz="1300" dirty="0"/>
           </a:p>
@@ -3527,7 +3527,7 @@
       </p:sp>
       <p:pic>
         <p:nvPicPr>
-          <p:cNvPr id="5" name="Image 0" descr="C:\Users\hyeon\AppData\Local\Temp\claude\C--Users-hyeon-Desktop-projects-chuncheon-busstop\0f55358b-f5eb-4845-9df0-56fc6a2517cf\scratchpad\deck\shots\00_place_search.png">    </p:cNvPr>
+          <p:cNvPr id="5" name="Image 0" descr="C:\Users\hyeon\Desktop\projects\chuncheon-busstop\shots\01-home.png">    </p:cNvPr>
           <p:cNvPicPr>
             <a:picLocks noChangeAspect="1"/>
           </p:cNvPicPr>
@@ -3542,11 +3542,18 @@
         <p:spPr>
           <a:xfrm>
             <a:off x="704088" y="1847088"/>
-            <a:ext cx="1835138" cy="3977640"/>
-          </a:xfrm>
-          <a:prstGeom prst="rect">
-            <a:avLst/>
-          </a:prstGeom>
+            <a:ext cx="1838009" cy="3977640"/>
+          </a:xfrm>
+          <a:prstGeom prst="rect">
+            <a:avLst/>
+          </a:prstGeom>
+          <a:effectLst>
+            <a:outerShdw sx="100000" sy="100000" kx="0" ky="0" algn="bl" rotWithShape="0" blurRad="177800" dist="38100" dir="5400000">
+              <a:srgbClr val="001871">
+                <a:alpha val="22000"/>
+              </a:srgbClr>
+            </a:outerShdw>
+          </a:effectLst>
         </p:spPr>
       </p:pic>
       <p:sp>
@@ -3558,7 +3565,7 @@
         <p:spPr>
           <a:xfrm>
             <a:off x="429768" y="5879592"/>
-            <a:ext cx="2383778" cy="274320"/>
+            <a:ext cx="2386649" cy="274320"/>
           </a:xfrm>
           <a:prstGeom prst="rect">
             <a:avLst/>
@@ -3582,7 +3589,7 @@
                 <a:ea typeface="맑은 고딕" pitchFamily="34" charset="-122"/>
                 <a:cs typeface="맑은 고딕" pitchFamily="34" charset="-120"/>
               </a:rPr>
-              <a:t>① 장소 찾기 · [음성으로 찾기]</a:t>
+              <a:t>① 홈 — 출발은 이미 채워져 있음</a:t>
             </a:r>
             <a:endParaRPr lang="en-US" sz="950" dirty="0"/>
           </a:p>
@@ -3590,7 +3597,7 @@
       </p:sp>
       <p:pic>
         <p:nvPicPr>
-          <p:cNvPr id="7" name="Image 1" descr="C:\Users\hyeon\AppData\Local\Temp\claude\C--Users-hyeon-Desktop-projects-chuncheon-busstop\0f55358b-f5eb-4845-9df0-56fc6a2517cf\scratchpad\deck\shots\01_home_route.png">    </p:cNvPr>
+          <p:cNvPr id="7" name="Image 1" descr="C:\Users\hyeon\Desktop\projects\chuncheon-busstop\shots\02-search-modal.png">    </p:cNvPr>
           <p:cNvPicPr>
             <a:picLocks noChangeAspect="1"/>
           </p:cNvPicPr>
@@ -3604,12 +3611,19 @@
         </p:blipFill>
         <p:spPr>
           <a:xfrm>
-            <a:off x="2923274" y="1847088"/>
-            <a:ext cx="1835138" cy="3977640"/>
-          </a:xfrm>
-          <a:prstGeom prst="rect">
-            <a:avLst/>
-          </a:prstGeom>
+            <a:off x="2926145" y="1847088"/>
+            <a:ext cx="1838009" cy="3977640"/>
+          </a:xfrm>
+          <a:prstGeom prst="rect">
+            <a:avLst/>
+          </a:prstGeom>
+          <a:effectLst>
+            <a:outerShdw sx="100000" sy="100000" kx="0" ky="0" algn="bl" rotWithShape="0" blurRad="177800" dist="38100" dir="5400000">
+              <a:srgbClr val="001871">
+                <a:alpha val="22000"/>
+              </a:srgbClr>
+            </a:outerShdw>
+          </a:effectLst>
         </p:spPr>
       </p:pic>
       <p:sp>
@@ -3620,8 +3634,8 @@
         </p:nvSpPr>
         <p:spPr>
           <a:xfrm>
-            <a:off x="2648954" y="5879592"/>
-            <a:ext cx="2383778" cy="274320"/>
+            <a:off x="2651825" y="5879592"/>
+            <a:ext cx="2386649" cy="274320"/>
           </a:xfrm>
           <a:prstGeom prst="rect">
             <a:avLst/>
@@ -3645,7 +3659,7 @@
                 <a:ea typeface="맑은 고딕" pitchFamily="34" charset="-122"/>
                 <a:cs typeface="맑은 고딕" pitchFamily="34" charset="-120"/>
               </a:rPr>
-              <a:t>② 추천 경로 카드 (실시간 도착)</a:t>
+              <a:t>② 도착 찾기 · 음성 · 위치 확인</a:t>
             </a:r>
             <a:endParaRPr lang="en-US" sz="950" dirty="0"/>
           </a:p>
@@ -3659,8 +3673,8 @@
         </p:nvSpPr>
         <p:spPr>
           <a:xfrm>
-            <a:off x="5307053" y="1847088"/>
-            <a:ext cx="6317714" cy="292608"/>
+            <a:off x="5312794" y="1847088"/>
+            <a:ext cx="6311973" cy="292608"/>
           </a:xfrm>
           <a:prstGeom prst="rect">
             <a:avLst/>
@@ -3698,8 +3712,8 @@
         </p:nvSpPr>
         <p:spPr>
           <a:xfrm>
-            <a:off x="5307053" y="2267712"/>
-            <a:ext cx="6317714" cy="621792"/>
+            <a:off x="5312794" y="2267712"/>
+            <a:ext cx="6311973" cy="621792"/>
           </a:xfrm>
           <a:prstGeom prst="roundRect">
             <a:avLst>
@@ -3725,8 +3739,8 @@
         </p:nvSpPr>
         <p:spPr>
           <a:xfrm>
-            <a:off x="5544797" y="2340864"/>
-            <a:ext cx="5860514" cy="256032"/>
+            <a:off x="5550538" y="2340864"/>
+            <a:ext cx="5854773" cy="256032"/>
           </a:xfrm>
           <a:prstGeom prst="rect">
             <a:avLst/>
@@ -3750,7 +3764,7 @@
                 <a:ea typeface="맑은 고딕" pitchFamily="34" charset="-122"/>
                 <a:cs typeface="맑은 고딕" pitchFamily="34" charset="-120"/>
               </a:rPr>
-              <a:t>말하면 검색됩니다</a:t>
+              <a:t>출발지는 저희가 채웁니다</a:t>
             </a:r>
             <a:endParaRPr lang="en-US" sz="1200" dirty="0"/>
           </a:p>
@@ -3764,8 +3778,8 @@
         </p:nvSpPr>
         <p:spPr>
           <a:xfrm>
-            <a:off x="5544797" y="2587752"/>
-            <a:ext cx="5860514" cy="237744"/>
+            <a:off x="5550538" y="2587752"/>
+            <a:ext cx="5854773" cy="237744"/>
           </a:xfrm>
           <a:prstGeom prst="rect">
             <a:avLst/>
@@ -3789,7 +3803,7 @@
                 <a:ea typeface="맑은 고딕" pitchFamily="34" charset="-122"/>
                 <a:cs typeface="맑은 고딕" pitchFamily="34" charset="-120"/>
               </a:rPr>
-              <a:t>타이핑 없이 “춘천중앙시장”이라고 말하면 결과가 뜹니다</a:t>
+              <a:t>GPS 좌표를 주소로 바꿔 '강원특별자치도 춘천시 후석로 454'로 자동 입력</a:t>
             </a:r>
             <a:endParaRPr lang="en-US" sz="1000" dirty="0"/>
           </a:p>
@@ -3803,8 +3817,8 @@
         </p:nvSpPr>
         <p:spPr>
           <a:xfrm>
-            <a:off x="5307053" y="2980944"/>
-            <a:ext cx="6317714" cy="621792"/>
+            <a:off x="5312794" y="2980944"/>
+            <a:ext cx="6311973" cy="621792"/>
           </a:xfrm>
           <a:prstGeom prst="roundRect">
             <a:avLst>
@@ -3830,8 +3844,8 @@
         </p:nvSpPr>
         <p:spPr>
           <a:xfrm>
-            <a:off x="5544797" y="3054096"/>
-            <a:ext cx="5860514" cy="256032"/>
+            <a:off x="5550538" y="3054096"/>
+            <a:ext cx="5854773" cy="256032"/>
           </a:xfrm>
           <a:prstGeom prst="rect">
             <a:avLst/>
@@ -3855,7 +3869,7 @@
                 <a:ea typeface="맑은 고딕" pitchFamily="34" charset="-122"/>
                 <a:cs typeface="맑은 고딕" pitchFamily="34" charset="-120"/>
               </a:rPr>
-              <a:t>고른 위치가 맞는지 지도로 확인</a:t>
+              <a:t>말해도 됩니다</a:t>
             </a:r>
             <a:endParaRPr lang="en-US" sz="1200" dirty="0"/>
           </a:p>
@@ -3869,8 +3883,8 @@
         </p:nvSpPr>
         <p:spPr>
           <a:xfrm>
-            <a:off x="5544797" y="3300984"/>
-            <a:ext cx="5860514" cy="237744"/>
+            <a:off x="5550538" y="3300984"/>
+            <a:ext cx="5854773" cy="237744"/>
           </a:xfrm>
           <a:prstGeom prst="rect">
             <a:avLst/>
@@ -3894,7 +3908,7 @@
                 <a:ea typeface="맑은 고딕" pitchFamily="34" charset="-122"/>
                 <a:cs typeface="맑은 고딕" pitchFamily="34" charset="-120"/>
               </a:rPr>
-              <a:t>글자만으로 헷갈리지 않도록 선택한 곳을 지도로 되보여줍니다</a:t>
+              <a:t>파란 마이크 버튼 — 타이핑 없이 “한림대학교”라고 말하면 검색됩니다</a:t>
             </a:r>
             <a:endParaRPr lang="en-US" sz="1000" dirty="0"/>
           </a:p>
@@ -3908,8 +3922,8 @@
         </p:nvSpPr>
         <p:spPr>
           <a:xfrm>
-            <a:off x="5307053" y="3694176"/>
-            <a:ext cx="6317714" cy="621792"/>
+            <a:off x="5312794" y="3694176"/>
+            <a:ext cx="6311973" cy="621792"/>
           </a:xfrm>
           <a:prstGeom prst="roundRect">
             <a:avLst>
@@ -3935,8 +3949,8 @@
         </p:nvSpPr>
         <p:spPr>
           <a:xfrm>
-            <a:off x="5544797" y="3767328"/>
-            <a:ext cx="5860514" cy="256032"/>
+            <a:off x="5550538" y="3767328"/>
+            <a:ext cx="5854773" cy="256032"/>
           </a:xfrm>
           <a:prstGeom prst="rect">
             <a:avLst/>
@@ -3960,7 +3974,7 @@
                 <a:ea typeface="맑은 고딕" pitchFamily="34" charset="-122"/>
                 <a:cs typeface="맑은 고딕" pitchFamily="34" charset="-120"/>
               </a:rPr>
-              <a:t>출발지는 GPS 주소가 자동으로</a:t>
+              <a:t>고른 곳이 맞는지 지도로</a:t>
             </a:r>
             <a:endParaRPr lang="en-US" sz="1200" dirty="0"/>
           </a:p>
@@ -3974,8 +3988,8 @@
         </p:nvSpPr>
         <p:spPr>
           <a:xfrm>
-            <a:off x="5544797" y="4014216"/>
-            <a:ext cx="5860514" cy="237744"/>
+            <a:off x="5550538" y="4014216"/>
+            <a:ext cx="5854773" cy="237744"/>
           </a:xfrm>
           <a:prstGeom prst="rect">
             <a:avLst/>
@@ -3999,7 +4013,7 @@
                 <a:ea typeface="맑은 고딕" pitchFamily="34" charset="-122"/>
                 <a:cs typeface="맑은 고딕" pitchFamily="34" charset="-120"/>
               </a:rPr>
-              <a:t>카카오 역지오코딩 — 어르신이 자기 주소를 입력할 필요가 없습니다</a:t>
+              <a:t>이름이 비슷한 곳이 여럿일 때 글자만 보고 잘못 고르지 않도록</a:t>
             </a:r>
             <a:endParaRPr lang="en-US" sz="1000" dirty="0"/>
           </a:p>
@@ -4013,8 +4027,8 @@
         </p:nvSpPr>
         <p:spPr>
           <a:xfrm>
-            <a:off x="5307053" y="4407408"/>
-            <a:ext cx="6317714" cy="621792"/>
+            <a:off x="5312794" y="4407408"/>
+            <a:ext cx="6311973" cy="621792"/>
           </a:xfrm>
           <a:prstGeom prst="roundRect">
             <a:avLst>
@@ -4040,8 +4054,8 @@
         </p:nvSpPr>
         <p:spPr>
           <a:xfrm>
-            <a:off x="5544797" y="4480560"/>
-            <a:ext cx="5860514" cy="256032"/>
+            <a:off x="5550538" y="4480560"/>
+            <a:ext cx="5854773" cy="256032"/>
           </a:xfrm>
           <a:prstGeom prst="rect">
             <a:avLst/>
@@ -4065,7 +4079,7 @@
                 <a:ea typeface="맑은 고딕" pitchFamily="34" charset="-122"/>
                 <a:cs typeface="맑은 고딕" pitchFamily="34" charset="-120"/>
               </a:rPr>
-              <a:t>추천 경로는 하나만</a:t>
+              <a:t>버튼은 [확인] 하나</a:t>
             </a:r>
             <a:endParaRPr lang="en-US" sz="1200" dirty="0"/>
           </a:p>
@@ -4079,8 +4093,8 @@
         </p:nvSpPr>
         <p:spPr>
           <a:xfrm>
-            <a:off x="5544797" y="4727448"/>
-            <a:ext cx="5860514" cy="237744"/>
+            <a:off x="5550538" y="4727448"/>
+            <a:ext cx="5854773" cy="237744"/>
           </a:xfrm>
           <a:prstGeom prst="rect">
             <a:avLst/>
@@ -4104,7 +4118,7 @@
                 <a:ea typeface="맑은 고딕" pitchFamily="34" charset="-122"/>
                 <a:cs typeface="맑은 고딕" pitchFamily="34" charset="-120"/>
               </a:rPr>
-              <a:t>직통 우선 · 환승 1회까지 탐색해 가장 빠른 하나만 보여줍니다</a:t>
+              <a:t>고를 것이 없으면 헤맬 일도 없습니다</a:t>
             </a:r>
             <a:endParaRPr lang="en-US" sz="1000" dirty="0"/>
           </a:p>
@@ -4118,7 +4132,7 @@
         </p:nvSpPr>
         <p:spPr>
           <a:xfrm>
-            <a:off x="5307053" y="5266944"/>
+            <a:off x="5312794" y="5266944"/>
             <a:ext cx="1188720" cy="310896"/>
           </a:xfrm>
           <a:prstGeom prst="rect">
@@ -4157,8 +4171,8 @@
         </p:nvSpPr>
         <p:spPr>
           <a:xfrm>
-            <a:off x="6541493" y="5266944"/>
-            <a:ext cx="1602985" cy="310896"/>
+            <a:off x="6547234" y="5266944"/>
+            <a:ext cx="1601071" cy="310896"/>
           </a:xfrm>
           <a:prstGeom prst="roundRect">
             <a:avLst>
@@ -4184,8 +4198,8 @@
         </p:nvSpPr>
         <p:spPr>
           <a:xfrm>
-            <a:off x="6541493" y="5266944"/>
-            <a:ext cx="1602985" cy="310896"/>
+            <a:off x="6547234" y="5266944"/>
+            <a:ext cx="1601071" cy="310896"/>
           </a:xfrm>
           <a:prstGeom prst="rect">
             <a:avLst/>
@@ -4223,8 +4237,8 @@
         </p:nvSpPr>
         <p:spPr>
           <a:xfrm>
-            <a:off x="8235918" y="5266944"/>
-            <a:ext cx="1602985" cy="310896"/>
+            <a:off x="8239745" y="5266944"/>
+            <a:ext cx="1601071" cy="310896"/>
           </a:xfrm>
           <a:prstGeom prst="roundRect">
             <a:avLst>
@@ -4250,8 +4264,8 @@
         </p:nvSpPr>
         <p:spPr>
           <a:xfrm>
-            <a:off x="8235918" y="5266944"/>
-            <a:ext cx="1602985" cy="310896"/>
+            <a:off x="8239745" y="5266944"/>
+            <a:ext cx="1601071" cy="310896"/>
           </a:xfrm>
           <a:prstGeom prst="rect">
             <a:avLst/>
@@ -4289,8 +4303,8 @@
         </p:nvSpPr>
         <p:spPr>
           <a:xfrm>
-            <a:off x="9930342" y="5266944"/>
-            <a:ext cx="1602985" cy="310896"/>
+            <a:off x="9932256" y="5266944"/>
+            <a:ext cx="1601071" cy="310896"/>
           </a:xfrm>
           <a:prstGeom prst="roundRect">
             <a:avLst>
@@ -4316,8 +4330,8 @@
         </p:nvSpPr>
         <p:spPr>
           <a:xfrm>
-            <a:off x="9930342" y="5266944"/>
-            <a:ext cx="1602985" cy="310896"/>
+            <a:off x="9932256" y="5266944"/>
+            <a:ext cx="1601071" cy="310896"/>
           </a:xfrm>
           <a:prstGeom prst="rect">
             <a:avLst/>
@@ -4355,8 +4369,8 @@
         </p:nvSpPr>
         <p:spPr>
           <a:xfrm>
-            <a:off x="5307053" y="5705856"/>
-            <a:ext cx="6317714" cy="274320"/>
+            <a:off x="5312794" y="5705856"/>
+            <a:ext cx="6311973" cy="274320"/>
           </a:xfrm>
           <a:prstGeom prst="rect">
             <a:avLst/>
@@ -4582,7 +4596,7 @@
                 <a:ea typeface="맑은 고딕" pitchFamily="34" charset="-122"/>
                 <a:cs typeface="맑은 고딕" pitchFamily="34" charset="-120"/>
               </a:rPr>
-              <a:t>실시간 안내 — 지금 어디쯤인지, 어디서 쉴 수 있는지</a:t>
+              <a:t>탈 버스와 내릴 곳, 그리고 그 길 위의 그늘</a:t>
             </a:r>
             <a:endParaRPr lang="en-US" sz="2700" dirty="0"/>
           </a:p>
@@ -4621,7 +4635,7 @@
                 <a:ea typeface="맑은 고딕" pitchFamily="34" charset="-122"/>
                 <a:cs typeface="맑은 고딕" pitchFamily="34" charset="-120"/>
               </a:rPr>
-              <a:t>타는 곳부터 도착지까지를 한 화면 타임라인으로. 각 지점의 시설과 근처 쉼터를 같이 봅니다</a:t>
+              <a:t>추천 경로는 하나만. 누르면 타는 곳부터 도착지까지가 한 화면 타임라인이 됩니다</a:t>
             </a:r>
             <a:endParaRPr lang="en-US" sz="1300" dirty="0"/>
           </a:p>
@@ -4629,7 +4643,7 @@
       </p:sp>
       <p:pic>
         <p:nvPicPr>
-          <p:cNvPr id="5" name="Image 0" descr="C:\Users\hyeon\AppData\Local\Temp\claude\C--Users-hyeon-Desktop-projects-chuncheon-busstop\0f55358b-f5eb-4845-9df0-56fc6a2517cf\scratchpad\deck\shots\02_live_timeline.png">    </p:cNvPr>
+          <p:cNvPr id="5" name="Image 0" descr="C:\Users\hyeon\Desktop\projects\chuncheon-busstop\shots\03-recommend.png">    </p:cNvPr>
           <p:cNvPicPr>
             <a:picLocks noChangeAspect="1"/>
           </p:cNvPicPr>
@@ -4643,12 +4657,19 @@
         </p:blipFill>
         <p:spPr>
           <a:xfrm>
-            <a:off x="704088" y="1810512"/>
-            <a:ext cx="1898419" cy="4114800"/>
-          </a:xfrm>
-          <a:prstGeom prst="rect">
-            <a:avLst/>
-          </a:prstGeom>
+            <a:off x="704088" y="1847088"/>
+            <a:ext cx="1838009" cy="3977640"/>
+          </a:xfrm>
+          <a:prstGeom prst="rect">
+            <a:avLst/>
+          </a:prstGeom>
+          <a:effectLst>
+            <a:outerShdw sx="100000" sy="100000" kx="0" ky="0" algn="bl" rotWithShape="0" blurRad="177800" dist="38100" dir="5400000">
+              <a:srgbClr val="001871">
+                <a:alpha val="22000"/>
+              </a:srgbClr>
+            </a:outerShdw>
+          </a:effectLst>
         </p:spPr>
       </p:pic>
       <p:sp>
@@ -4659,8 +4680,8 @@
         </p:nvSpPr>
         <p:spPr>
           <a:xfrm>
-            <a:off x="429768" y="5980176"/>
-            <a:ext cx="2447059" cy="274320"/>
+            <a:off x="429768" y="5879592"/>
+            <a:ext cx="2386649" cy="274320"/>
           </a:xfrm>
           <a:prstGeom prst="rect">
             <a:avLst/>
@@ -4684,22 +4705,92 @@
                 <a:ea typeface="맑은 고딕" pitchFamily="34" charset="-122"/>
                 <a:cs typeface="맑은 고딕" pitchFamily="34" charset="-120"/>
               </a:rPr>
-              <a:t>가는 길 안내 (GPS 추종 타임라인)</a:t>
+              <a:t>① 추천 경로 — 6번 · 동산A → 한림대학교</a:t>
             </a:r>
             <a:endParaRPr lang="en-US" sz="950" dirty="0"/>
           </a:p>
         </p:txBody>
       </p:sp>
-      <p:sp>
-        <p:nvSpPr>
-          <p:cNvPr id="7" name="Text 4"/>
-          <p:cNvSpPr/>
-          <p:nvPr/>
-        </p:nvSpPr>
-        <p:spPr>
-          <a:xfrm>
-            <a:off x="3151147" y="1847088"/>
-            <a:ext cx="8473620" cy="292608"/>
+      <p:pic>
+        <p:nvPicPr>
+          <p:cNvPr id="7" name="Image 1" descr="C:\Users\hyeon\Desktop\projects\chuncheon-busstop\shots\04-live.png">    </p:cNvPr>
+          <p:cNvPicPr>
+            <a:picLocks noChangeAspect="1"/>
+          </p:cNvPicPr>
+          <p:nvPr/>
+        </p:nvPicPr>
+        <p:blipFill>
+          <a:blip r:embed="rId2"/>
+          <a:stretch>
+            <a:fillRect/>
+          </a:stretch>
+        </p:blipFill>
+        <p:spPr>
+          <a:xfrm>
+            <a:off x="2926145" y="1847088"/>
+            <a:ext cx="1838009" cy="3977640"/>
+          </a:xfrm>
+          <a:prstGeom prst="rect">
+            <a:avLst/>
+          </a:prstGeom>
+          <a:effectLst>
+            <a:outerShdw sx="100000" sy="100000" kx="0" ky="0" algn="bl" rotWithShape="0" blurRad="177800" dist="38100" dir="5400000">
+              <a:srgbClr val="001871">
+                <a:alpha val="22000"/>
+              </a:srgbClr>
+            </a:outerShdw>
+          </a:effectLst>
+        </p:spPr>
+      </p:pic>
+      <p:sp>
+        <p:nvSpPr>
+          <p:cNvPr id="8" name="Text 4"/>
+          <p:cNvSpPr/>
+          <p:nvPr/>
+        </p:nvSpPr>
+        <p:spPr>
+          <a:xfrm>
+            <a:off x="2651825" y="5879592"/>
+            <a:ext cx="2386649" cy="274320"/>
+          </a:xfrm>
+          <a:prstGeom prst="rect">
+            <a:avLst/>
+          </a:prstGeom>
+          <a:noFill/>
+          <a:ln/>
+        </p:spPr>
+        <p:txBody>
+          <a:bodyPr wrap="square" lIns="0" tIns="0" rIns="0" bIns="0" rtlCol="0" anchor="ctr"/>
+          <a:lstStyle/>
+          <a:p>
+            <a:pPr algn="ctr" indent="0" marL="0">
+              <a:buNone/>
+            </a:pPr>
+            <a:r>
+              <a:rPr lang="en-US" sz="950" b="1" dirty="0">
+                <a:solidFill>
+                  <a:srgbClr val="6E7796"/>
+                </a:solidFill>
+                <a:latin typeface="맑은 고딕" pitchFamily="34" charset="0"/>
+                <a:ea typeface="맑은 고딕" pitchFamily="34" charset="-122"/>
+                <a:cs typeface="맑은 고딕" pitchFamily="34" charset="-120"/>
+              </a:rPr>
+              <a:t>② 가는 길 안내 타임라인</a:t>
+            </a:r>
+            <a:endParaRPr lang="en-US" sz="950" dirty="0"/>
+          </a:p>
+        </p:txBody>
+      </p:sp>
+      <p:sp>
+        <p:nvSpPr>
+          <p:cNvPr id="9" name="Text 5"/>
+          <p:cNvSpPr/>
+          <p:nvPr/>
+        </p:nvSpPr>
+        <p:spPr>
+          <a:xfrm>
+            <a:off x="5312794" y="1847088"/>
+            <a:ext cx="6311973" cy="292608"/>
           </a:xfrm>
           <a:prstGeom prst="rect">
             <a:avLst/>
@@ -4731,14 +4822,14 @@
       </p:sp>
       <p:sp>
         <p:nvSpPr>
-          <p:cNvPr id="8" name="Shape 5"/>
-          <p:cNvSpPr/>
-          <p:nvPr/>
-        </p:nvSpPr>
-        <p:spPr>
-          <a:xfrm>
-            <a:off x="3151147" y="2267712"/>
-            <a:ext cx="8473620" cy="621792"/>
+          <p:cNvPr id="10" name="Shape 6"/>
+          <p:cNvSpPr/>
+          <p:nvPr/>
+        </p:nvSpPr>
+        <p:spPr>
+          <a:xfrm>
+            <a:off x="5312794" y="2267712"/>
+            <a:ext cx="6311973" cy="621792"/>
           </a:xfrm>
           <a:prstGeom prst="roundRect">
             <a:avLst>
@@ -4758,14 +4849,14 @@
       </p:sp>
       <p:sp>
         <p:nvSpPr>
-          <p:cNvPr id="9" name="Text 6"/>
-          <p:cNvSpPr/>
-          <p:nvPr/>
-        </p:nvSpPr>
-        <p:spPr>
-          <a:xfrm>
-            <a:off x="3388891" y="2340864"/>
-            <a:ext cx="8016420" cy="256032"/>
+          <p:cNvPr id="11" name="Text 7"/>
+          <p:cNvSpPr/>
+          <p:nvPr/>
+        </p:nvSpPr>
+        <p:spPr>
+          <a:xfrm>
+            <a:off x="5550538" y="2340864"/>
+            <a:ext cx="5854773" cy="256032"/>
           </a:xfrm>
           <a:prstGeom prst="rect">
             <a:avLst/>
@@ -4789,7 +4880,7 @@
                 <a:ea typeface="맑은 고딕" pitchFamily="34" charset="-122"/>
                 <a:cs typeface="맑은 고딕" pitchFamily="34" charset="-120"/>
               </a:rPr>
-              <a:t>탈 버스가 몇 분 뒤 오는지</a:t>
+              <a:t>추천은 하나만 보여줍니다</a:t>
             </a:r>
             <a:endParaRPr lang="en-US" sz="1200" dirty="0"/>
           </a:p>
@@ -4797,14 +4888,14 @@
       </p:sp>
       <p:sp>
         <p:nvSpPr>
-          <p:cNvPr id="10" name="Text 7"/>
-          <p:cNvSpPr/>
-          <p:nvPr/>
-        </p:nvSpPr>
-        <p:spPr>
-          <a:xfrm>
-            <a:off x="3388891" y="2587752"/>
-            <a:ext cx="8016420" cy="237744"/>
+          <p:cNvPr id="12" name="Text 8"/>
+          <p:cNvSpPr/>
+          <p:nvPr/>
+        </p:nvSpPr>
+        <p:spPr>
+          <a:xfrm>
+            <a:off x="5550538" y="2587752"/>
+            <a:ext cx="5854773" cy="237744"/>
           </a:xfrm>
           <a:prstGeom prst="rect">
             <a:avLst/>
@@ -4828,7 +4919,7 @@
                 <a:ea typeface="맑은 고딕" pitchFamily="34" charset="-122"/>
                 <a:cs typeface="맑은 고딕" pitchFamily="34" charset="-120"/>
               </a:rPr>
-              <a:t>국토부 TAGO 실시간 도착정보를 30초마다 갱신합니다</a:t>
+              <a:t>직통 우선 · 환승 1회까지 찾아 가장 빠른 하나. 고민할 거리를 만들지 않습니다</a:t>
             </a:r>
             <a:endParaRPr lang="en-US" sz="1000" dirty="0"/>
           </a:p>
@@ -4836,14 +4927,14 @@
       </p:sp>
       <p:sp>
         <p:nvSpPr>
-          <p:cNvPr id="11" name="Shape 8"/>
-          <p:cNvSpPr/>
-          <p:nvPr/>
-        </p:nvSpPr>
-        <p:spPr>
-          <a:xfrm>
-            <a:off x="3151147" y="2980944"/>
-            <a:ext cx="8473620" cy="621792"/>
+          <p:cNvPr id="13" name="Shape 9"/>
+          <p:cNvSpPr/>
+          <p:nvPr/>
+        </p:nvSpPr>
+        <p:spPr>
+          <a:xfrm>
+            <a:off x="5312794" y="2980944"/>
+            <a:ext cx="6311973" cy="621792"/>
           </a:xfrm>
           <a:prstGeom prst="roundRect">
             <a:avLst>
@@ -4863,14 +4954,14 @@
       </p:sp>
       <p:sp>
         <p:nvSpPr>
-          <p:cNvPr id="12" name="Text 9"/>
-          <p:cNvSpPr/>
-          <p:nvPr/>
-        </p:nvSpPr>
-        <p:spPr>
-          <a:xfrm>
-            <a:off x="3388891" y="3054096"/>
-            <a:ext cx="8016420" cy="256032"/>
+          <p:cNvPr id="14" name="Text 10"/>
+          <p:cNvSpPr/>
+          <p:nvPr/>
+        </p:nvSpPr>
+        <p:spPr>
+          <a:xfrm>
+            <a:off x="5550538" y="3054096"/>
+            <a:ext cx="5854773" cy="256032"/>
           </a:xfrm>
           <a:prstGeom prst="rect">
             <a:avLst/>
@@ -4902,14 +4993,14 @@
       </p:sp>
       <p:sp>
         <p:nvSpPr>
-          <p:cNvPr id="13" name="Text 10"/>
-          <p:cNvSpPr/>
-          <p:nvPr/>
-        </p:nvSpPr>
-        <p:spPr>
-          <a:xfrm>
-            <a:off x="3388891" y="3300984"/>
-            <a:ext cx="8016420" cy="237744"/>
+          <p:cNvPr id="15" name="Text 11"/>
+          <p:cNvSpPr/>
+          <p:nvPr/>
+        </p:nvSpPr>
+        <p:spPr>
+          <a:xfrm>
+            <a:off x="5550538" y="3300984"/>
+            <a:ext cx="5854773" cy="237744"/>
           </a:xfrm>
           <a:prstGeom prst="rect">
             <a:avLst/>
@@ -4933,7 +5024,7 @@
                 <a:ea typeface="맑은 고딕" pitchFamily="34" charset="-122"/>
                 <a:cs typeface="맑은 고딕" pitchFamily="34" charset="-120"/>
               </a:rPr>
-              <a:t>지붕 · 의자 · 쉘터 · 안내기 · 조명을 단어 칩으로 — 흐린 칩은 '없음'</a:t>
+              <a:t>지붕 · 의자 · 쉘터 · 안내기 · 조명 — 점선으로 흐린 칩이 '없음'입니다</a:t>
             </a:r>
             <a:endParaRPr lang="en-US" sz="1000" dirty="0"/>
           </a:p>
@@ -4941,14 +5032,14 @@
       </p:sp>
       <p:sp>
         <p:nvSpPr>
-          <p:cNvPr id="14" name="Shape 11"/>
-          <p:cNvSpPr/>
-          <p:nvPr/>
-        </p:nvSpPr>
-        <p:spPr>
-          <a:xfrm>
-            <a:off x="3151147" y="3694176"/>
-            <a:ext cx="8473620" cy="621792"/>
+          <p:cNvPr id="16" name="Shape 12"/>
+          <p:cNvSpPr/>
+          <p:nvPr/>
+        </p:nvSpPr>
+        <p:spPr>
+          <a:xfrm>
+            <a:off x="5312794" y="3694176"/>
+            <a:ext cx="6311973" cy="621792"/>
           </a:xfrm>
           <a:prstGeom prst="roundRect">
             <a:avLst>
@@ -4968,14 +5059,14 @@
       </p:sp>
       <p:sp>
         <p:nvSpPr>
-          <p:cNvPr id="15" name="Text 12"/>
-          <p:cNvSpPr/>
-          <p:nvPr/>
-        </p:nvSpPr>
-        <p:spPr>
-          <a:xfrm>
-            <a:off x="3388891" y="3767328"/>
-            <a:ext cx="8016420" cy="256032"/>
+          <p:cNvPr id="17" name="Text 13"/>
+          <p:cNvSpPr/>
+          <p:nvPr/>
+        </p:nvSpPr>
+        <p:spPr>
+          <a:xfrm>
+            <a:off x="5550538" y="3767328"/>
+            <a:ext cx="5854773" cy="256032"/>
           </a:xfrm>
           <a:prstGeom prst="rect">
             <a:avLst/>
@@ -4999,7 +5090,7 @@
                 <a:ea typeface="맑은 고딕" pitchFamily="34" charset="-122"/>
                 <a:cs typeface="맑은 고딕" pitchFamily="34" charset="-120"/>
               </a:rPr>
-              <a:t>버스 안에서도 위치를 따라옵니다</a:t>
+              <a:t>없는 건 없다고 씁니다</a:t>
             </a:r>
             <a:endParaRPr lang="en-US" sz="1200" dirty="0"/>
           </a:p>
@@ -5007,14 +5098,14 @@
       </p:sp>
       <p:sp>
         <p:nvSpPr>
-          <p:cNvPr id="16" name="Text 13"/>
-          <p:cNvSpPr/>
-          <p:nvPr/>
-        </p:nvSpPr>
-        <p:spPr>
-          <a:xfrm>
-            <a:off x="3388891" y="4014216"/>
-            <a:ext cx="8016420" cy="237744"/>
+          <p:cNvPr id="18" name="Text 14"/>
+          <p:cNvSpPr/>
+          <p:nvPr/>
+        </p:nvSpPr>
+        <p:spPr>
+          <a:xfrm>
+            <a:off x="5550538" y="4014216"/>
+            <a:ext cx="5854773" cy="237744"/>
           </a:xfrm>
           <a:prstGeom prst="rect">
             <a:avLst/>
@@ -5038,7 +5129,7 @@
                 <a:ea typeface="맑은 고딕" pitchFamily="34" charset="-122"/>
                 <a:cs typeface="맑은 고딕" pitchFamily="34" charset="-120"/>
               </a:rPr>
-              <a:t>GPS로 경유 정류장을 매칭해 '하차까지 N개 정류장'을 표시</a:t>
+              <a:t>화면의 '도착 정보 없음', '지금 오는 버스 없음'이 그 예입니다 (목업 없음)</a:t>
             </a:r>
             <a:endParaRPr lang="en-US" sz="1000" dirty="0"/>
           </a:p>
@@ -5046,14 +5137,14 @@
       </p:sp>
       <p:sp>
         <p:nvSpPr>
-          <p:cNvPr id="17" name="Shape 14"/>
-          <p:cNvSpPr/>
-          <p:nvPr/>
-        </p:nvSpPr>
-        <p:spPr>
-          <a:xfrm>
-            <a:off x="3151147" y="4407408"/>
-            <a:ext cx="8473620" cy="621792"/>
+          <p:cNvPr id="19" name="Shape 15"/>
+          <p:cNvSpPr/>
+          <p:nvPr/>
+        </p:nvSpPr>
+        <p:spPr>
+          <a:xfrm>
+            <a:off x="5312794" y="4407408"/>
+            <a:ext cx="6311973" cy="621792"/>
           </a:xfrm>
           <a:prstGeom prst="roundRect">
             <a:avLst>
@@ -5073,14 +5164,14 @@
       </p:sp>
       <p:sp>
         <p:nvSpPr>
-          <p:cNvPr id="18" name="Text 15"/>
-          <p:cNvSpPr/>
-          <p:nvPr/>
-        </p:nvSpPr>
-        <p:spPr>
-          <a:xfrm>
-            <a:off x="3388891" y="4480560"/>
-            <a:ext cx="8016420" cy="256032"/>
+          <p:cNvPr id="20" name="Text 16"/>
+          <p:cNvSpPr/>
+          <p:nvPr/>
+        </p:nvSpPr>
+        <p:spPr>
+          <a:xfrm>
+            <a:off x="5550538" y="4480560"/>
+            <a:ext cx="5854773" cy="256032"/>
           </a:xfrm>
           <a:prstGeom prst="rect">
             <a:avLst/>
@@ -5112,14 +5203,14 @@
       </p:sp>
       <p:sp>
         <p:nvSpPr>
-          <p:cNvPr id="19" name="Text 16"/>
-          <p:cNvSpPr/>
-          <p:nvPr/>
-        </p:nvSpPr>
-        <p:spPr>
-          <a:xfrm>
-            <a:off x="3388891" y="4727448"/>
-            <a:ext cx="8016420" cy="237744"/>
+          <p:cNvPr id="21" name="Text 17"/>
+          <p:cNvSpPr/>
+          <p:nvPr/>
+        </p:nvSpPr>
+        <p:spPr>
+          <a:xfrm>
+            <a:off x="5550538" y="4727448"/>
+            <a:ext cx="5854773" cy="237744"/>
           </a:xfrm>
           <a:prstGeom prst="rect">
             <a:avLst/>
@@ -5151,13 +5242,13 @@
       </p:sp>
       <p:sp>
         <p:nvSpPr>
-          <p:cNvPr id="20" name="Text 17"/>
-          <p:cNvSpPr/>
-          <p:nvPr/>
-        </p:nvSpPr>
-        <p:spPr>
-          <a:xfrm>
-            <a:off x="3151147" y="5266944"/>
+          <p:cNvPr id="22" name="Text 18"/>
+          <p:cNvSpPr/>
+          <p:nvPr/>
+        </p:nvSpPr>
+        <p:spPr>
+          <a:xfrm>
+            <a:off x="5312794" y="5266944"/>
             <a:ext cx="1188720" cy="310896"/>
           </a:xfrm>
           <a:prstGeom prst="rect">
@@ -5190,14 +5281,14 @@
       </p:sp>
       <p:sp>
         <p:nvSpPr>
-          <p:cNvPr id="21" name="Shape 18"/>
-          <p:cNvSpPr/>
-          <p:nvPr/>
-        </p:nvSpPr>
-        <p:spPr>
-          <a:xfrm>
-            <a:off x="4385587" y="5266944"/>
-            <a:ext cx="2321620" cy="310896"/>
+          <p:cNvPr id="23" name="Shape 19"/>
+          <p:cNvSpPr/>
+          <p:nvPr/>
+        </p:nvSpPr>
+        <p:spPr>
+          <a:xfrm>
+            <a:off x="6547234" y="5266944"/>
+            <a:ext cx="1601071" cy="310896"/>
           </a:xfrm>
           <a:prstGeom prst="roundRect">
             <a:avLst>
@@ -5217,14 +5308,14 @@
       </p:sp>
       <p:sp>
         <p:nvSpPr>
-          <p:cNvPr id="22" name="Text 19"/>
-          <p:cNvSpPr/>
-          <p:nvPr/>
-        </p:nvSpPr>
-        <p:spPr>
-          <a:xfrm>
-            <a:off x="4385587" y="5266944"/>
-            <a:ext cx="2321620" cy="310896"/>
+          <p:cNvPr id="24" name="Text 20"/>
+          <p:cNvSpPr/>
+          <p:nvPr/>
+        </p:nvSpPr>
+        <p:spPr>
+          <a:xfrm>
+            <a:off x="6547234" y="5266944"/>
+            <a:ext cx="1601071" cy="310896"/>
           </a:xfrm>
           <a:prstGeom prst="rect">
             <a:avLst/>
@@ -5256,14 +5347,14 @@
       </p:sp>
       <p:sp>
         <p:nvSpPr>
-          <p:cNvPr id="23" name="Shape 20"/>
-          <p:cNvSpPr/>
-          <p:nvPr/>
-        </p:nvSpPr>
-        <p:spPr>
-          <a:xfrm>
-            <a:off x="6798647" y="5266944"/>
-            <a:ext cx="2321620" cy="310896"/>
+          <p:cNvPr id="25" name="Shape 21"/>
+          <p:cNvSpPr/>
+          <p:nvPr/>
+        </p:nvSpPr>
+        <p:spPr>
+          <a:xfrm>
+            <a:off x="8239745" y="5266944"/>
+            <a:ext cx="1601071" cy="310896"/>
           </a:xfrm>
           <a:prstGeom prst="roundRect">
             <a:avLst>
@@ -5283,14 +5374,14 @@
       </p:sp>
       <p:sp>
         <p:nvSpPr>
-          <p:cNvPr id="24" name="Text 21"/>
-          <p:cNvSpPr/>
-          <p:nvPr/>
-        </p:nvSpPr>
-        <p:spPr>
-          <a:xfrm>
-            <a:off x="6798647" y="5266944"/>
-            <a:ext cx="2321620" cy="310896"/>
+          <p:cNvPr id="26" name="Text 22"/>
+          <p:cNvSpPr/>
+          <p:nvPr/>
+        </p:nvSpPr>
+        <p:spPr>
+          <a:xfrm>
+            <a:off x="8239745" y="5266944"/>
+            <a:ext cx="1601071" cy="310896"/>
           </a:xfrm>
           <a:prstGeom prst="rect">
             <a:avLst/>
@@ -5322,14 +5413,14 @@
       </p:sp>
       <p:sp>
         <p:nvSpPr>
-          <p:cNvPr id="25" name="Shape 22"/>
-          <p:cNvSpPr/>
-          <p:nvPr/>
-        </p:nvSpPr>
-        <p:spPr>
-          <a:xfrm>
-            <a:off x="9211707" y="5266944"/>
-            <a:ext cx="2321620" cy="310896"/>
+          <p:cNvPr id="27" name="Shape 23"/>
+          <p:cNvSpPr/>
+          <p:nvPr/>
+        </p:nvSpPr>
+        <p:spPr>
+          <a:xfrm>
+            <a:off x="9932256" y="5266944"/>
+            <a:ext cx="1601071" cy="310896"/>
           </a:xfrm>
           <a:prstGeom prst="roundRect">
             <a:avLst>
@@ -5349,14 +5440,14 @@
       </p:sp>
       <p:sp>
         <p:nvSpPr>
-          <p:cNvPr id="26" name="Text 23"/>
-          <p:cNvSpPr/>
-          <p:nvPr/>
-        </p:nvSpPr>
-        <p:spPr>
-          <a:xfrm>
-            <a:off x="9211707" y="5266944"/>
-            <a:ext cx="2321620" cy="310896"/>
+          <p:cNvPr id="28" name="Text 24"/>
+          <p:cNvSpPr/>
+          <p:nvPr/>
+        </p:nvSpPr>
+        <p:spPr>
+          <a:xfrm>
+            <a:off x="9932256" y="5266944"/>
+            <a:ext cx="1601071" cy="310896"/>
           </a:xfrm>
           <a:prstGeom prst="rect">
             <a:avLst/>
@@ -5388,14 +5479,14 @@
       </p:sp>
       <p:sp>
         <p:nvSpPr>
-          <p:cNvPr id="27" name="Text 24"/>
-          <p:cNvSpPr/>
-          <p:nvPr/>
-        </p:nvSpPr>
-        <p:spPr>
-          <a:xfrm>
-            <a:off x="3151147" y="5705856"/>
-            <a:ext cx="8473620" cy="274320"/>
+          <p:cNvPr id="29" name="Text 25"/>
+          <p:cNvSpPr/>
+          <p:nvPr/>
+        </p:nvSpPr>
+        <p:spPr>
+          <a:xfrm>
+            <a:off x="5312794" y="5705856"/>
+            <a:ext cx="6311973" cy="274320"/>
           </a:xfrm>
           <a:prstGeom prst="rect">
             <a:avLst/>
@@ -5427,7 +5518,7 @@
       </p:sp>
       <p:sp>
         <p:nvSpPr>
-          <p:cNvPr id="28" name="Text 25"/>
+          <p:cNvPr id="30" name="Text 26"/>
           <p:cNvSpPr/>
           <p:nvPr/>
         </p:nvSpPr>
@@ -5466,7 +5557,7 @@
       </p:sp>
       <p:sp>
         <p:nvSpPr>
-          <p:cNvPr id="29" name="Text 26"/>
+          <p:cNvPr id="31" name="Text 27"/>
           <p:cNvSpPr/>
           <p:nvPr/>
         </p:nvSpPr>
@@ -5621,7 +5712,7 @@
                 <a:ea typeface="맑은 고딕" pitchFamily="34" charset="-122"/>
                 <a:cs typeface="맑은 고딕" pitchFamily="34" charset="-120"/>
               </a:rPr>
-              <a:t>정류장 상세와 무더위쉼터 지도</a:t>
+              <a:t>발표장에서도 보여드릴 수 있게, 그리고 쉼터는 지도로</a:t>
             </a:r>
             <a:endParaRPr lang="en-US" sz="2700" dirty="0"/>
           </a:p>
@@ -5660,7 +5751,7 @@
                 <a:ea typeface="맑은 고딕" pitchFamily="34" charset="-122"/>
                 <a:cs typeface="맑은 고딕" pitchFamily="34" charset="-120"/>
               </a:rPr>
-              <a:t>'여기서 기다려도 되나'에 답하고, 아니면 갈 곳을 알려줍니다</a:t>
+              <a:t>여기서 버스를 탈 수는 없으니 위치를 옮겨가며 시연합니다</a:t>
             </a:r>
             <a:endParaRPr lang="en-US" sz="1300" dirty="0"/>
           </a:p>
@@ -5668,7 +5759,7 @@
       </p:sp>
       <p:pic>
         <p:nvPicPr>
-          <p:cNvPr id="5" name="Image 0" descr="C:\Users\hyeon\AppData\Local\Temp\claude\C--Users-hyeon-Desktop-projects-chuncheon-busstop\0f55358b-f5eb-4845-9df0-56fc6a2517cf\scratchpad\deck\shots\04_stop_detail.png">    </p:cNvPr>
+          <p:cNvPr id="5" name="Image 0" descr="C:\Users\hyeon\Desktop\projects\chuncheon-busstop\shots\06-live-riding.png">    </p:cNvPr>
           <p:cNvPicPr>
             <a:picLocks noChangeAspect="1"/>
           </p:cNvPicPr>
@@ -5683,11 +5774,18 @@
         <p:spPr>
           <a:xfrm>
             <a:off x="704088" y="1847088"/>
-            <a:ext cx="1835138" cy="3977640"/>
-          </a:xfrm>
-          <a:prstGeom prst="rect">
-            <a:avLst/>
-          </a:prstGeom>
+            <a:ext cx="1838009" cy="3977640"/>
+          </a:xfrm>
+          <a:prstGeom prst="rect">
+            <a:avLst/>
+          </a:prstGeom>
+          <a:effectLst>
+            <a:outerShdw sx="100000" sy="100000" kx="0" ky="0" algn="bl" rotWithShape="0" blurRad="177800" dist="38100" dir="5400000">
+              <a:srgbClr val="001871">
+                <a:alpha val="22000"/>
+              </a:srgbClr>
+            </a:outerShdw>
+          </a:effectLst>
         </p:spPr>
       </p:pic>
       <p:sp>
@@ -5699,7 +5797,7 @@
         <p:spPr>
           <a:xfrm>
             <a:off x="429768" y="5879592"/>
-            <a:ext cx="2383778" cy="274320"/>
+            <a:ext cx="2386649" cy="274320"/>
           </a:xfrm>
           <a:prstGeom prst="rect">
             <a:avLst/>
@@ -5723,7 +5821,7 @@
                 <a:ea typeface="맑은 고딕" pitchFamily="34" charset="-122"/>
                 <a:cs typeface="맑은 고딕" pitchFamily="34" charset="-120"/>
               </a:rPr>
-              <a:t>① 정류장 상세 · 기다리기 환경</a:t>
+              <a:t>① 시연 모드 — 위치를 한 칸씩 이동</a:t>
             </a:r>
             <a:endParaRPr lang="en-US" sz="950" dirty="0"/>
           </a:p>
@@ -5731,7 +5829,7 @@
       </p:sp>
       <p:pic>
         <p:nvPicPr>
-          <p:cNvPr id="7" name="Image 1" descr="C:\Users\hyeon\AppData\Local\Temp\claude\C--Users-hyeon-Desktop-projects-chuncheon-busstop\0f55358b-f5eb-4845-9df0-56fc6a2517cf\scratchpad\deck\shots\03_map_shelter.png">    </p:cNvPr>
+          <p:cNvPr id="7" name="Image 1" descr="C:\Users\hyeon\Desktop\projects\chuncheon-busstop\shots\07-shelter-map.png">    </p:cNvPr>
           <p:cNvPicPr>
             <a:picLocks noChangeAspect="1"/>
           </p:cNvPicPr>
@@ -5745,12 +5843,19 @@
         </p:blipFill>
         <p:spPr>
           <a:xfrm>
-            <a:off x="2923274" y="1847088"/>
-            <a:ext cx="1835138" cy="3977640"/>
-          </a:xfrm>
-          <a:prstGeom prst="rect">
-            <a:avLst/>
-          </a:prstGeom>
+            <a:off x="2926145" y="1847088"/>
+            <a:ext cx="1838009" cy="3977640"/>
+          </a:xfrm>
+          <a:prstGeom prst="rect">
+            <a:avLst/>
+          </a:prstGeom>
+          <a:effectLst>
+            <a:outerShdw sx="100000" sy="100000" kx="0" ky="0" algn="bl" rotWithShape="0" blurRad="177800" dist="38100" dir="5400000">
+              <a:srgbClr val="001871">
+                <a:alpha val="22000"/>
+              </a:srgbClr>
+            </a:outerShdw>
+          </a:effectLst>
         </p:spPr>
       </p:pic>
       <p:sp>
@@ -5761,8 +5866,8 @@
         </p:nvSpPr>
         <p:spPr>
           <a:xfrm>
-            <a:off x="2648954" y="5879592"/>
-            <a:ext cx="2383778" cy="274320"/>
+            <a:off x="2651825" y="5879592"/>
+            <a:ext cx="2386649" cy="274320"/>
           </a:xfrm>
           <a:prstGeom prst="rect">
             <a:avLst/>
@@ -5786,7 +5891,7 @@
                 <a:ea typeface="맑은 고딕" pitchFamily="34" charset="-122"/>
                 <a:cs typeface="맑은 고딕" pitchFamily="34" charset="-120"/>
               </a:rPr>
-              <a:t>② 쉼터 탭 · 무더위쉼터 226곳</a:t>
+              <a:t>② 쉼터 탭 — 무더위쉼터 226곳</a:t>
             </a:r>
             <a:endParaRPr lang="en-US" sz="950" dirty="0"/>
           </a:p>
@@ -5800,8 +5905,8 @@
         </p:nvSpPr>
         <p:spPr>
           <a:xfrm>
-            <a:off x="5307053" y="1847088"/>
-            <a:ext cx="6317714" cy="292608"/>
+            <a:off x="5312794" y="1847088"/>
+            <a:ext cx="6311973" cy="292608"/>
           </a:xfrm>
           <a:prstGeom prst="rect">
             <a:avLst/>
@@ -5839,8 +5944,8 @@
         </p:nvSpPr>
         <p:spPr>
           <a:xfrm>
-            <a:off x="5307053" y="2267712"/>
-            <a:ext cx="6317714" cy="621792"/>
+            <a:off x="5312794" y="2267712"/>
+            <a:ext cx="6311973" cy="621792"/>
           </a:xfrm>
           <a:prstGeom prst="roundRect">
             <a:avLst>
@@ -5866,8 +5971,8 @@
         </p:nvSpPr>
         <p:spPr>
           <a:xfrm>
-            <a:off x="5544797" y="2340864"/>
-            <a:ext cx="5860514" cy="256032"/>
+            <a:off x="5550538" y="2340864"/>
+            <a:ext cx="5854773" cy="256032"/>
           </a:xfrm>
           <a:prstGeom prst="rect">
             <a:avLst/>
@@ -5891,7 +5996,7 @@
                 <a:ea typeface="맑은 고딕" pitchFamily="34" charset="-122"/>
                 <a:cs typeface="맑은 고딕" pitchFamily="34" charset="-120"/>
               </a:rPr>
-              <a:t>시설을 단어로 말합니다</a:t>
+              <a:t>시연 모드로 위치를 옮깁니다</a:t>
             </a:r>
             <a:endParaRPr lang="en-US" sz="1200" dirty="0"/>
           </a:p>
@@ -5905,8 +6010,8 @@
         </p:nvSpPr>
         <p:spPr>
           <a:xfrm>
-            <a:off x="5544797" y="2587752"/>
-            <a:ext cx="5860514" cy="237744"/>
+            <a:off x="5550538" y="2587752"/>
+            <a:ext cx="5854773" cy="237744"/>
           </a:xfrm>
           <a:prstGeom prst="rect">
             <a:avLst/>
@@ -5930,7 +6035,7 @@
                 <a:ea typeface="맑은 고딕" pitchFamily="34" charset="-122"/>
                 <a:cs typeface="맑은 고딕" pitchFamily="34" charset="-120"/>
               </a:rPr>
-              <a:t>'지붕 없음 · 의자 있음 · 쉘터 없음 · 안내기 있음 · 조명 있음'</a:t>
+              <a:t>[이전][다음]으로 승차 → 하차 → 도착을 이동 — 데이터는 전부 실제 값입니다</a:t>
             </a:r>
             <a:endParaRPr lang="en-US" sz="1000" dirty="0"/>
           </a:p>
@@ -5944,8 +6049,8 @@
         </p:nvSpPr>
         <p:spPr>
           <a:xfrm>
-            <a:off x="5307053" y="2980944"/>
-            <a:ext cx="6317714" cy="621792"/>
+            <a:off x="5312794" y="2980944"/>
+            <a:ext cx="6311973" cy="621792"/>
           </a:xfrm>
           <a:prstGeom prst="roundRect">
             <a:avLst>
@@ -5971,8 +6076,8 @@
         </p:nvSpPr>
         <p:spPr>
           <a:xfrm>
-            <a:off x="5544797" y="3054096"/>
-            <a:ext cx="5860514" cy="256032"/>
+            <a:off x="5550538" y="3054096"/>
+            <a:ext cx="5854773" cy="256032"/>
           </a:xfrm>
           <a:prstGeom prst="rect">
             <a:avLst/>
@@ -5996,7 +6101,7 @@
                 <a:ea typeface="맑은 고딕" pitchFamily="34" charset="-122"/>
                 <a:cs typeface="맑은 고딕" pitchFamily="34" charset="-120"/>
               </a:rPr>
-              <a:t>없으면 근처 무더위쉼터로</a:t>
+              <a:t>도착 지점의 검은 쉼표 핀</a:t>
             </a:r>
             <a:endParaRPr lang="en-US" sz="1200" dirty="0"/>
           </a:p>
@@ -6010,8 +6115,8 @@
         </p:nvSpPr>
         <p:spPr>
           <a:xfrm>
-            <a:off x="5544797" y="3300984"/>
-            <a:ext cx="5860514" cy="237744"/>
+            <a:off x="5550538" y="3300984"/>
+            <a:ext cx="5854773" cy="237744"/>
           </a:xfrm>
           <a:prstGeom prst="rect">
             <a:avLst/>
@@ -6035,7 +6140,7 @@
                 <a:ea typeface="맑은 고딕" pitchFamily="34" charset="-122"/>
                 <a:cs typeface="맑은 고딕" pitchFamily="34" charset="-120"/>
               </a:rPr>
-              <a:t>최근접 쉼터를 이름과 거리로 — 이 정류장은 GS25편의점춘천승리점</a:t>
+              <a:t>쉼표정류장의 표식입니다. 지금 있는 곳은 파란 점으로 구분됩니다</a:t>
             </a:r>
             <a:endParaRPr lang="en-US" sz="1000" dirty="0"/>
           </a:p>
@@ -6049,8 +6154,8 @@
         </p:nvSpPr>
         <p:spPr>
           <a:xfrm>
-            <a:off x="5307053" y="3694176"/>
-            <a:ext cx="6317714" cy="621792"/>
+            <a:off x="5312794" y="3694176"/>
+            <a:ext cx="6311973" cy="621792"/>
           </a:xfrm>
           <a:prstGeom prst="roundRect">
             <a:avLst>
@@ -6076,8 +6181,8 @@
         </p:nvSpPr>
         <p:spPr>
           <a:xfrm>
-            <a:off x="5544797" y="3767328"/>
-            <a:ext cx="5860514" cy="256032"/>
+            <a:off x="5550538" y="3767328"/>
+            <a:ext cx="5854773" cy="256032"/>
           </a:xfrm>
           <a:prstGeom prst="rect">
             <a:avLst/>
@@ -6115,8 +6220,8 @@
         </p:nvSpPr>
         <p:spPr>
           <a:xfrm>
-            <a:off x="5544797" y="4014216"/>
-            <a:ext cx="5860514" cy="237744"/>
+            <a:off x="5550538" y="4014216"/>
+            <a:ext cx="5854773" cy="237744"/>
           </a:xfrm>
           <a:prstGeom prst="rect">
             <a:avLst/>
@@ -6154,8 +6259,8 @@
         </p:nvSpPr>
         <p:spPr>
           <a:xfrm>
-            <a:off x="5307053" y="4407408"/>
-            <a:ext cx="6317714" cy="621792"/>
+            <a:off x="5312794" y="4407408"/>
+            <a:ext cx="6311973" cy="621792"/>
           </a:xfrm>
           <a:prstGeom prst="roundRect">
             <a:avLst>
@@ -6181,8 +6286,8 @@
         </p:nvSpPr>
         <p:spPr>
           <a:xfrm>
-            <a:off x="5544797" y="4480560"/>
-            <a:ext cx="5860514" cy="256032"/>
+            <a:off x="5550538" y="4480560"/>
+            <a:ext cx="5854773" cy="256032"/>
           </a:xfrm>
           <a:prstGeom prst="rect">
             <a:avLst/>
@@ -6220,8 +6325,8 @@
         </p:nvSpPr>
         <p:spPr>
           <a:xfrm>
-            <a:off x="5544797" y="4727448"/>
-            <a:ext cx="5860514" cy="237744"/>
+            <a:off x="5550538" y="4727448"/>
+            <a:ext cx="5854773" cy="237744"/>
           </a:xfrm>
           <a:prstGeom prst="rect">
             <a:avLst/>
@@ -6245,7 +6350,7 @@
                 <a:ea typeface="맑은 고딕" pitchFamily="34" charset="-122"/>
                 <a:cs typeface="맑은 고딕" pitchFamily="34" charset="-120"/>
               </a:rPr>
-              <a:t>운영 요일·시간으로 판정 — 자정을 넘겨 여는 곳도 정확히</a:t>
+              <a:t>'GS25편의점춘천극동점 · 56m · 운영 중' — 요일과 시간으로 판정합니다</a:t>
             </a:r>
             <a:endParaRPr lang="en-US" sz="1000" dirty="0"/>
           </a:p>
@@ -6259,7 +6364,7 @@
         </p:nvSpPr>
         <p:spPr>
           <a:xfrm>
-            <a:off x="5307053" y="5266944"/>
+            <a:off x="5312794" y="5266944"/>
             <a:ext cx="1188720" cy="310896"/>
           </a:xfrm>
           <a:prstGeom prst="rect">
@@ -6298,8 +6403,8 @@
         </p:nvSpPr>
         <p:spPr>
           <a:xfrm>
-            <a:off x="6541493" y="5266944"/>
-            <a:ext cx="1602985" cy="310896"/>
+            <a:off x="6547234" y="5266944"/>
+            <a:ext cx="1601071" cy="310896"/>
           </a:xfrm>
           <a:prstGeom prst="roundRect">
             <a:avLst>
@@ -6325,8 +6430,8 @@
         </p:nvSpPr>
         <p:spPr>
           <a:xfrm>
-            <a:off x="6541493" y="5266944"/>
-            <a:ext cx="1602985" cy="310896"/>
+            <a:off x="6547234" y="5266944"/>
+            <a:ext cx="1601071" cy="310896"/>
           </a:xfrm>
           <a:prstGeom prst="rect">
             <a:avLst/>
@@ -6364,8 +6469,8 @@
         </p:nvSpPr>
         <p:spPr>
           <a:xfrm>
-            <a:off x="8235918" y="5266944"/>
-            <a:ext cx="1602985" cy="310896"/>
+            <a:off x="8239745" y="5266944"/>
+            <a:ext cx="1601071" cy="310896"/>
           </a:xfrm>
           <a:prstGeom prst="roundRect">
             <a:avLst>
@@ -6391,8 +6496,8 @@
         </p:nvSpPr>
         <p:spPr>
           <a:xfrm>
-            <a:off x="8235918" y="5266944"/>
-            <a:ext cx="1602985" cy="310896"/>
+            <a:off x="8239745" y="5266944"/>
+            <a:ext cx="1601071" cy="310896"/>
           </a:xfrm>
           <a:prstGeom prst="rect">
             <a:avLst/>
@@ -6430,8 +6535,8 @@
         </p:nvSpPr>
         <p:spPr>
           <a:xfrm>
-            <a:off x="9930342" y="5266944"/>
-            <a:ext cx="1602985" cy="310896"/>
+            <a:off x="9932256" y="5266944"/>
+            <a:ext cx="1601071" cy="310896"/>
           </a:xfrm>
           <a:prstGeom prst="roundRect">
             <a:avLst>
@@ -6457,8 +6562,8 @@
         </p:nvSpPr>
         <p:spPr>
           <a:xfrm>
-            <a:off x="9930342" y="5266944"/>
-            <a:ext cx="1602985" cy="310896"/>
+            <a:off x="9932256" y="5266944"/>
+            <a:ext cx="1601071" cy="310896"/>
           </a:xfrm>
           <a:prstGeom prst="rect">
             <a:avLst/>
@@ -6482,7 +6587,7 @@
                 <a:ea typeface="맑은 고딕" pitchFamily="34" charset="-122"/>
                 <a:cs typeface="맑은 고딕" pitchFamily="34" charset="-120"/>
               </a:rPr>
-              <a:t>출처 라벨 표기</a:t>
+              <a:t>운영시간 판정</a:t>
             </a:r>
             <a:endParaRPr lang="en-US" sz="950" dirty="0"/>
           </a:p>
@@ -6496,8 +6601,8 @@
         </p:nvSpPr>
         <p:spPr>
           <a:xfrm>
-            <a:off x="5307053" y="5705856"/>
-            <a:ext cx="6317714" cy="274320"/>
+            <a:off x="5312794" y="5705856"/>
+            <a:ext cx="6311973" cy="274320"/>
           </a:xfrm>
           <a:prstGeom prst="rect">
             <a:avLst/>
@@ -6770,7 +6875,7 @@
       </p:sp>
       <p:pic>
         <p:nvPicPr>
-          <p:cNvPr id="5" name="Image 0" descr="C:\Users\hyeon\AppData\Local\Temp\claude\C--Users-hyeon-Desktop-projects-chuncheon-busstop\0f55358b-f5eb-4845-9df0-56fc6a2517cf\scratchpad\deck\shots\05_report.png">    </p:cNvPr>
+          <p:cNvPr id="5" name="Image 0" descr="C:\Users\hyeon\Desktop\projects\chuncheon-busstop\shots\08-report.png">    </p:cNvPr>
           <p:cNvPicPr>
             <a:picLocks noChangeAspect="1"/>
           </p:cNvPicPr>
@@ -6785,11 +6890,18 @@
         <p:spPr>
           <a:xfrm>
             <a:off x="704088" y="1810512"/>
-            <a:ext cx="1898419" cy="4114800"/>
-          </a:xfrm>
-          <a:prstGeom prst="rect">
-            <a:avLst/>
-          </a:prstGeom>
+            <a:ext cx="1901389" cy="4114800"/>
+          </a:xfrm>
+          <a:prstGeom prst="rect">
+            <a:avLst/>
+          </a:prstGeom>
+          <a:effectLst>
+            <a:outerShdw sx="100000" sy="100000" kx="0" ky="0" algn="bl" rotWithShape="0" blurRad="177800" dist="38100" dir="5400000">
+              <a:srgbClr val="001871">
+                <a:alpha val="22000"/>
+              </a:srgbClr>
+            </a:outerShdw>
+          </a:effectLst>
         </p:spPr>
       </p:pic>
       <p:sp>
@@ -6801,7 +6913,7 @@
         <p:spPr>
           <a:xfrm>
             <a:off x="429768" y="5980176"/>
-            <a:ext cx="2447059" cy="274320"/>
+            <a:ext cx="2450029" cy="274320"/>
           </a:xfrm>
           <a:prstGeom prst="rect">
             <a:avLst/>
@@ -6839,8 +6951,8 @@
         </p:nvSpPr>
         <p:spPr>
           <a:xfrm>
-            <a:off x="3151147" y="1847088"/>
-            <a:ext cx="8473620" cy="292608"/>
+            <a:off x="3154117" y="1847088"/>
+            <a:ext cx="8470651" cy="292608"/>
           </a:xfrm>
           <a:prstGeom prst="rect">
             <a:avLst/>
@@ -6878,8 +6990,8 @@
         </p:nvSpPr>
         <p:spPr>
           <a:xfrm>
-            <a:off x="3151147" y="2267712"/>
-            <a:ext cx="8473620" cy="621792"/>
+            <a:off x="3154117" y="2267712"/>
+            <a:ext cx="8470651" cy="621792"/>
           </a:xfrm>
           <a:prstGeom prst="roundRect">
             <a:avLst>
@@ -6905,8 +7017,8 @@
         </p:nvSpPr>
         <p:spPr>
           <a:xfrm>
-            <a:off x="3388891" y="2340864"/>
-            <a:ext cx="8016420" cy="256032"/>
+            <a:off x="3391861" y="2340864"/>
+            <a:ext cx="8013451" cy="256032"/>
           </a:xfrm>
           <a:prstGeom prst="rect">
             <a:avLst/>
@@ -6944,8 +7056,8 @@
         </p:nvSpPr>
         <p:spPr>
           <a:xfrm>
-            <a:off x="3388891" y="2587752"/>
-            <a:ext cx="8016420" cy="237744"/>
+            <a:off x="3391861" y="2587752"/>
+            <a:ext cx="8013451" cy="237744"/>
           </a:xfrm>
           <a:prstGeom prst="rect">
             <a:avLst/>
@@ -6969,7 +7081,7 @@
                 <a:ea typeface="맑은 고딕" pitchFamily="34" charset="-122"/>
                 <a:cs typeface="맑은 고딕" pitchFamily="34" charset="-120"/>
               </a:rPr>
-              <a:t>정류장은 촬영 위치(GPS)로 자동 매칭, 시각은 서버 타임스탬프</a:t>
+              <a:t>정류장은 촬영 위치(GPS)로 자동 매칭, 시각은 서버 시각 — 입력할 칸이 없습니다</a:t>
             </a:r>
             <a:endParaRPr lang="en-US" sz="1000" dirty="0"/>
           </a:p>
@@ -6983,8 +7095,8 @@
         </p:nvSpPr>
         <p:spPr>
           <a:xfrm>
-            <a:off x="3151147" y="2980944"/>
-            <a:ext cx="8473620" cy="621792"/>
+            <a:off x="3154117" y="2980944"/>
+            <a:ext cx="8470651" cy="621792"/>
           </a:xfrm>
           <a:prstGeom prst="roundRect">
             <a:avLst>
@@ -7010,8 +7122,8 @@
         </p:nvSpPr>
         <p:spPr>
           <a:xfrm>
-            <a:off x="3388891" y="3054096"/>
-            <a:ext cx="8016420" cy="256032"/>
+            <a:off x="3391861" y="3054096"/>
+            <a:ext cx="8013451" cy="256032"/>
           </a:xfrm>
           <a:prstGeom prst="rect">
             <a:avLst/>
@@ -7035,7 +7147,7 @@
                 <a:ea typeface="맑은 고딕" pitchFamily="34" charset="-122"/>
                 <a:cs typeface="맑은 고딕" pitchFamily="34" charset="-120"/>
               </a:rPr>
-              <a:t>AI가 사진을 읽습니다</a:t>
+              <a:t>찍기 전에 한 줄 안내</a:t>
             </a:r>
             <a:endParaRPr lang="en-US" sz="1200" dirty="0"/>
           </a:p>
@@ -7049,8 +7161,8 @@
         </p:nvSpPr>
         <p:spPr>
           <a:xfrm>
-            <a:off x="3388891" y="3300984"/>
-            <a:ext cx="8016420" cy="237744"/>
+            <a:off x="3391861" y="3300984"/>
+            <a:ext cx="8013451" cy="237744"/>
           </a:xfrm>
           <a:prstGeom prst="rect">
             <a:avLst/>
@@ -7074,7 +7186,7 @@
                 <a:ea typeface="맑은 고딕" pitchFamily="34" charset="-122"/>
                 <a:cs typeface="맑은 고딕" pitchFamily="34" charset="-120"/>
               </a:rPr>
-              <a:t>그늘·의자·쉘터·안내기 유무 판독 + 민원 종류 분류(파손/고장/노후/청결)</a:t>
+              <a:t>'얼굴과 차량번호는 피해서 찍어 주세요' — 남의 정보까지 지킵니다</a:t>
             </a:r>
             <a:endParaRPr lang="en-US" sz="1000" dirty="0"/>
           </a:p>
@@ -7088,8 +7200,8 @@
         </p:nvSpPr>
         <p:spPr>
           <a:xfrm>
-            <a:off x="3151147" y="3694176"/>
-            <a:ext cx="8473620" cy="621792"/>
+            <a:off x="3154117" y="3694176"/>
+            <a:ext cx="8470651" cy="621792"/>
           </a:xfrm>
           <a:prstGeom prst="roundRect">
             <a:avLst>
@@ -7115,8 +7227,8 @@
         </p:nvSpPr>
         <p:spPr>
           <a:xfrm>
-            <a:off x="3388891" y="3767328"/>
-            <a:ext cx="8016420" cy="256032"/>
+            <a:off x="3391861" y="3767328"/>
+            <a:ext cx="8013451" cy="256032"/>
           </a:xfrm>
           <a:prstGeom prst="rect">
             <a:avLst/>
@@ -7140,7 +7252,7 @@
                 <a:ea typeface="맑은 고딕" pitchFamily="34" charset="-122"/>
                 <a:cs typeface="맑은 고딕" pitchFamily="34" charset="-120"/>
               </a:rPr>
-              <a:t>판독 결과가 안내에 반영</a:t>
+              <a:t>AI가 사진을 읽습니다</a:t>
             </a:r>
             <a:endParaRPr lang="en-US" sz="1200" dirty="0"/>
           </a:p>
@@ -7154,8 +7266,8 @@
         </p:nvSpPr>
         <p:spPr>
           <a:xfrm>
-            <a:off x="3388891" y="4014216"/>
-            <a:ext cx="8016420" cy="237744"/>
+            <a:off x="3391861" y="4014216"/>
+            <a:ext cx="8013451" cy="237744"/>
           </a:xfrm>
           <a:prstGeom prst="rect">
             <a:avLst/>
@@ -7179,7 +7291,7 @@
                 <a:ea typeface="맑은 고딕" pitchFamily="34" charset="-122"/>
                 <a:cs typeface="맑은 고딕" pitchFamily="34" charset="-120"/>
               </a:rPr>
-              <a:t>'미확인'이던 시설이 채워지고, 출처는 'AI 판독'으로 표기</a:t>
+              <a:t>그늘·의자·쉘터·안내기 유무 + 민원 종류 분류(파손/고장/노후/청결)</a:t>
             </a:r>
             <a:endParaRPr lang="en-US" sz="1000" dirty="0"/>
           </a:p>
@@ -7193,8 +7305,8 @@
         </p:nvSpPr>
         <p:spPr>
           <a:xfrm>
-            <a:off x="3151147" y="4407408"/>
-            <a:ext cx="8473620" cy="621792"/>
+            <a:off x="3154117" y="4407408"/>
+            <a:ext cx="8470651" cy="621792"/>
           </a:xfrm>
           <a:prstGeom prst="roundRect">
             <a:avLst>
@@ -7220,8 +7332,8 @@
         </p:nvSpPr>
         <p:spPr>
           <a:xfrm>
-            <a:off x="3388891" y="4480560"/>
-            <a:ext cx="8016420" cy="256032"/>
+            <a:off x="3391861" y="4480560"/>
+            <a:ext cx="8013451" cy="256032"/>
           </a:xfrm>
           <a:prstGeom prst="rect">
             <a:avLst/>
@@ -7259,8 +7371,8 @@
         </p:nvSpPr>
         <p:spPr>
           <a:xfrm>
-            <a:off x="3388891" y="4727448"/>
-            <a:ext cx="8016420" cy="237744"/>
+            <a:off x="3391861" y="4727448"/>
+            <a:ext cx="8013451" cy="237744"/>
           </a:xfrm>
           <a:prstGeom prst="rect">
             <a:avLst/>
@@ -7298,7 +7410,7 @@
         </p:nvSpPr>
         <p:spPr>
           <a:xfrm>
-            <a:off x="3151147" y="5266944"/>
+            <a:off x="3154117" y="5266944"/>
             <a:ext cx="1188720" cy="310896"/>
           </a:xfrm>
           <a:prstGeom prst="rect">
@@ -7337,8 +7449,8 @@
         </p:nvSpPr>
         <p:spPr>
           <a:xfrm>
-            <a:off x="4385587" y="5266944"/>
-            <a:ext cx="2321620" cy="310896"/>
+            <a:off x="4388557" y="5266944"/>
+            <a:ext cx="2320630" cy="310896"/>
           </a:xfrm>
           <a:prstGeom prst="roundRect">
             <a:avLst>
@@ -7364,8 +7476,8 @@
         </p:nvSpPr>
         <p:spPr>
           <a:xfrm>
-            <a:off x="4385587" y="5266944"/>
-            <a:ext cx="2321620" cy="310896"/>
+            <a:off x="4388557" y="5266944"/>
+            <a:ext cx="2320630" cy="310896"/>
           </a:xfrm>
           <a:prstGeom prst="rect">
             <a:avLst/>
@@ -7403,8 +7515,8 @@
         </p:nvSpPr>
         <p:spPr>
           <a:xfrm>
-            <a:off x="6798647" y="5266944"/>
-            <a:ext cx="2321620" cy="310896"/>
+            <a:off x="6800627" y="5266944"/>
+            <a:ext cx="2320630" cy="310896"/>
           </a:xfrm>
           <a:prstGeom prst="roundRect">
             <a:avLst>
@@ -7430,8 +7542,8 @@
         </p:nvSpPr>
         <p:spPr>
           <a:xfrm>
-            <a:off x="6798647" y="5266944"/>
-            <a:ext cx="2321620" cy="310896"/>
+            <a:off x="6800627" y="5266944"/>
+            <a:ext cx="2320630" cy="310896"/>
           </a:xfrm>
           <a:prstGeom prst="rect">
             <a:avLst/>
@@ -7469,8 +7581,8 @@
         </p:nvSpPr>
         <p:spPr>
           <a:xfrm>
-            <a:off x="9211707" y="5266944"/>
-            <a:ext cx="2321620" cy="310896"/>
+            <a:off x="9212697" y="5266944"/>
+            <a:ext cx="2320630" cy="310896"/>
           </a:xfrm>
           <a:prstGeom prst="roundRect">
             <a:avLst>
@@ -7496,8 +7608,8 @@
         </p:nvSpPr>
         <p:spPr>
           <a:xfrm>
-            <a:off x="9211707" y="5266944"/>
-            <a:ext cx="2321620" cy="310896"/>
+            <a:off x="9212697" y="5266944"/>
+            <a:ext cx="2320630" cy="310896"/>
           </a:xfrm>
           <a:prstGeom prst="rect">
             <a:avLst/>
@@ -7535,8 +7647,8 @@
         </p:nvSpPr>
         <p:spPr>
           <a:xfrm>
-            <a:off x="3151147" y="5705856"/>
-            <a:ext cx="8473620" cy="274320"/>
+            <a:off x="3154117" y="5705856"/>
+            <a:ext cx="8470651" cy="274320"/>
           </a:xfrm>
           <a:prstGeom prst="rect">
             <a:avLst/>
@@ -30160,7 +30272,7 @@
                 <a:ea typeface="맑은 고딕" pitchFamily="34" charset="-122"/>
                 <a:cs typeface="맑은 고딕" pitchFamily="34" charset="-120"/>
               </a:rPr>
-              <a:t>사진 한 장만 찍어주시면 됩니다</a:t>
+              <a:t>사진 찍어서 보내주세요</a:t>
             </a:r>
             <a:endParaRPr lang="en-US" sz="1600" dirty="0"/>
           </a:p>
@@ -30337,7 +30449,7 @@
                 <a:ea typeface="맑은 고딕" pitchFamily="34" charset="-122"/>
                 <a:cs typeface="맑은 고딕" pitchFamily="34" charset="-120"/>
               </a:rPr>
-              <a:t>AI가 사진을 읽어 시설 유무·민원 종류를 판독</a:t>
+              <a:t>얼굴·차량번호는 피해서 찍도록 안내합니다</a:t>
             </a:r>
             <a:endParaRPr lang="en-US" sz="1050" dirty="0"/>
           </a:p>
@@ -30396,7 +30508,7 @@
                 <a:ea typeface="맑은 고딕" pitchFamily="34" charset="-122"/>
                 <a:cs typeface="맑은 고딕" pitchFamily="34" charset="-120"/>
               </a:rPr>
-              <a:t>그 결과가 다음 사람의 안내 정보가 됩니다</a:t>
+              <a:t>AI가 읽은 결과가 다음 사람의 안내가 됩니다</a:t>
             </a:r>
             <a:endParaRPr lang="en-US" sz="1050" dirty="0"/>
           </a:p>
